--- a/docs/RASK_Bias_Screener.pptx
+++ b/docs/RASK_Bias_Screener.pptx
@@ -4763,7 +4763,7 @@
                 </a:solidFill>
                 <a:latin typeface="Calibri"/>
               </a:rPr>
-              <a:t>•  Fitted on 36 cities × 2 genders</a:t>
+              <a:t>•  Fitted on 33 cities, both genders</a:t>
             </a:r>
           </a:p>
           <a:p>
